--- a/presentation/Helm - הצעה לפיילוט.pptx
+++ b/presentation/Helm - הצעה לפיילוט.pptx
@@ -27,8 +27,8 @@
   <p:notesMasterIdLst>
     <p:notesMasterId r:id="rId20"/>
   </p:notesMasterIdLst>
-  <p:sldSz cx="9144000" cy="5143500"/>
-  <p:notesSz cx="5143500" cy="9144000"/>
+  <p:sldSz cx="12191695" cy="6858000"/>
+  <p:notesSz cx="6858000" cy="12191695"/>
   <p:defaultTextStyle>
     <a:lvl1pPr marL="0" algn="l" defTabSz="914400" rtl="0" eaLnBrk="1" latinLnBrk="0" hangingPunct="1">
       <a:defRPr sz="1800" kern="1200">
@@ -14769,7 +14769,7 @@
         <p:spPr>
           <a:xfrm>
             <a:off x="7863840" y="2286000"/>
-            <a:ext cx="3550615" cy="1005840"/>
+            <a:ext cx="3550615" cy="1234440"/>
           </a:xfrm>
           <a:prstGeom prst="rect">
             <a:avLst/>
@@ -14833,7 +14833,7 @@
         <p:spPr>
           <a:xfrm>
             <a:off x="8065008" y="2834640"/>
-            <a:ext cx="3148279" cy="292608"/>
+            <a:ext cx="3148279" cy="521208"/>
           </a:xfrm>
           <a:prstGeom prst="rect">
             <a:avLst/>
@@ -14874,8 +14874,8 @@
         </p:nvSpPr>
         <p:spPr>
           <a:xfrm>
-            <a:off x="7863840" y="3429000"/>
-            <a:ext cx="3550615" cy="1005840"/>
+            <a:off x="7863840" y="3657600"/>
+            <a:ext cx="3550615" cy="1234440"/>
           </a:xfrm>
           <a:prstGeom prst="rect">
             <a:avLst/>
@@ -14899,7 +14899,7 @@
         </p:nvSpPr>
         <p:spPr>
           <a:xfrm>
-            <a:off x="8065008" y="3593592"/>
+            <a:off x="8065008" y="3822192"/>
             <a:ext cx="3148279" cy="329184"/>
           </a:xfrm>
           <a:prstGeom prst="rect">
@@ -14938,8 +14938,8 @@
         </p:nvSpPr>
         <p:spPr>
           <a:xfrm>
-            <a:off x="8065008" y="3977640"/>
-            <a:ext cx="3148279" cy="292608"/>
+            <a:off x="8065008" y="4206240"/>
+            <a:ext cx="3148279" cy="521208"/>
           </a:xfrm>
           <a:prstGeom prst="rect">
             <a:avLst/>
@@ -14980,7 +14980,7 @@
         </p:nvSpPr>
         <p:spPr>
           <a:xfrm>
-            <a:off x="7863840" y="4572000"/>
+            <a:off x="7863840" y="5074920"/>
             <a:ext cx="3550615" cy="274320"/>
           </a:xfrm>
           <a:prstGeom prst="rect">
